--- a/Week1_Introduction_24.pptx
+++ b/Week1_Introduction_24.pptx
@@ -327,7 +327,7 @@
           <a:p>
             <a:fld id="{C8A432C8-69A7-458B-9684-2BFA64B31948}" type="datetime2">
               <a:rPr lang="en-US" smtClean="0"/>
-              <a:t>Monday, January 8, 2024</a:t>
+              <a:t>Wednesday, October 7, 2026</a:t>
             </a:fld>
             <a:endParaRPr lang="en-US"/>
           </a:p>
@@ -527,7 +527,7 @@
           <a:p>
             <a:fld id="{8CC057FC-95B6-4D89-AFDA-ABA33EE921E5}" type="datetime2">
               <a:rPr lang="en-US" smtClean="0"/>
-              <a:t>Monday, January 8, 2024</a:t>
+              <a:t>Wednesday, October 7, 2026</a:t>
             </a:fld>
             <a:endParaRPr lang="en-US"/>
           </a:p>
@@ -704,7 +704,7 @@
           <a:p>
             <a:fld id="{EC4549AC-EB31-477F-92A9-B1988E232878}" type="datetime2">
               <a:rPr lang="en-US" smtClean="0"/>
-              <a:t>Monday, January 8, 2024</a:t>
+              <a:t>Wednesday, October 7, 2026</a:t>
             </a:fld>
             <a:endParaRPr lang="en-US"/>
           </a:p>
@@ -869,7 +869,7 @@
           <a:p>
             <a:fld id="{6396A3A3-94A6-4E5B-AF39-173ACA3E61CC}" type="datetime2">
               <a:rPr lang="en-US" smtClean="0"/>
-              <a:t>Monday, January 8, 2024</a:t>
+              <a:t>Wednesday, October 7, 2026</a:t>
             </a:fld>
             <a:endParaRPr lang="en-US"/>
           </a:p>
@@ -1119,7 +1119,7 @@
           <a:p>
             <a:fld id="{9933D019-A32C-4EAD-B8E6-DBDA699692FD}" type="datetime2">
               <a:rPr lang="en-US" smtClean="0"/>
-              <a:t>Monday, January 8, 2024</a:t>
+              <a:t>Wednesday, October 7, 2026</a:t>
             </a:fld>
             <a:endParaRPr lang="en-US"/>
           </a:p>
@@ -1438,7 +1438,7 @@
           <a:p>
             <a:fld id="{CCEBA98F-560C-4997-81C4-81D4D9187EAB}" type="datetime2">
               <a:rPr lang="en-US" smtClean="0"/>
-              <a:t>Monday, January 8, 2024</a:t>
+              <a:t>Wednesday, October 7, 2026</a:t>
             </a:fld>
             <a:endParaRPr lang="en-US"/>
           </a:p>
@@ -1906,7 +1906,7 @@
           <a:p>
             <a:fld id="{150972B2-CA5C-437D-87D0-8081271A9E4B}" type="datetime2">
               <a:rPr lang="en-US" smtClean="0"/>
-              <a:t>Monday, January 8, 2024</a:t>
+              <a:t>Wednesday, October 7, 2026</a:t>
             </a:fld>
             <a:endParaRPr lang="en-US"/>
           </a:p>
@@ -2055,7 +2055,7 @@
           <a:p>
             <a:fld id="{79CD4847-11EF-4466-A8AD-85CDB7B49118}" type="datetime2">
               <a:rPr lang="en-US" smtClean="0"/>
-              <a:t>Monday, January 8, 2024</a:t>
+              <a:t>Wednesday, October 7, 2026</a:t>
             </a:fld>
             <a:endParaRPr lang="en-US"/>
           </a:p>
@@ -2147,7 +2147,7 @@
           <a:p>
             <a:fld id="{F168457A-3AB9-4880-8A0C-9F8524491207}" type="datetime2">
               <a:rPr lang="en-US" smtClean="0"/>
-              <a:t>Monday, January 8, 2024</a:t>
+              <a:t>Wednesday, October 7, 2026</a:t>
             </a:fld>
             <a:endParaRPr lang="en-US"/>
           </a:p>
@@ -2423,7 +2423,7 @@
           <a:p>
             <a:fld id="{3FE976D3-5B7F-4300-ABED-C91F1B2AE209}" type="datetime2">
               <a:rPr lang="en-US" smtClean="0"/>
-              <a:t>Monday, January 8, 2024</a:t>
+              <a:t>Wednesday, October 7, 2026</a:t>
             </a:fld>
             <a:endParaRPr lang="en-US"/>
           </a:p>
@@ -2730,7 +2730,7 @@
           <a:p>
             <a:fld id="{EBDC1E59-17DD-41CE-97CA-624A472382D4}" type="datetime2">
               <a:rPr lang="en-US" smtClean="0"/>
-              <a:t>Monday, January 8, 2024</a:t>
+              <a:t>Wednesday, October 7, 2026</a:t>
             </a:fld>
             <a:endParaRPr lang="en-US"/>
           </a:p>
@@ -3030,7 +3030,7 @@
           <a:p>
             <a:fld id="{A80CB818-7379-467D-8E76-EF9D9074A26C}" type="datetime2">
               <a:rPr lang="en-US" smtClean="0"/>
-              <a:t>Monday, January 8, 2024</a:t>
+              <a:t>Wednesday, October 7, 2026</a:t>
             </a:fld>
             <a:endParaRPr lang="en-US" dirty="0"/>
           </a:p>
@@ -3447,7 +3447,7 @@
           <a:p>
             <a:r>
               <a:rPr lang="en-US" dirty="0"/>
-              <a:t>R-Seminar Win 2024</a:t>
+              <a:t>R-Seminar FALL 2026</a:t>
             </a:r>
           </a:p>
         </p:txBody>
@@ -3470,7 +3470,7 @@
         </p:spPr>
         <p:txBody>
           <a:bodyPr>
-            <a:normAutofit fontScale="92500" lnSpcReduction="10000"/>
+            <a:normAutofit/>
           </a:bodyPr>
           <a:lstStyle/>
           <a:p>
@@ -3482,7 +3482,7 @@
           <a:p>
             <a:r>
               <a:rPr lang="en-US" dirty="0"/>
-              <a:t>2024</a:t>
+              <a:t>2026</a:t>
             </a:r>
           </a:p>
           <a:p>
@@ -3491,33 +3491,8 @@
           <a:p>
             <a:r>
               <a:rPr lang="en-US" dirty="0"/>
-              <a:t>Mon @ 3:30 – </a:t>
-            </a:r>
-            <a:r>
-              <a:rPr lang="en-US" dirty="0">
-                <a:highlight>
-                  <a:srgbClr val="FFFF00"/>
-                </a:highlight>
-              </a:rPr>
-              <a:t>Noble 1231 </a:t>
-            </a:r>
-            <a:r>
-              <a:rPr lang="en-US" dirty="0">
-                <a:highlight>
-                  <a:srgbClr val="FFFF00"/>
-                </a:highlight>
-                <a:sym typeface="Wingdings" pitchFamily="2" charset="2"/>
-              </a:rPr>
-              <a:t> ROOM CHANGE</a:t>
-            </a:r>
-            <a:endParaRPr lang="en-US" dirty="0">
-              <a:highlight>
-                <a:srgbClr val="FFFF00"/>
-              </a:highlight>
-            </a:endParaRPr>
-          </a:p>
-          <a:p>
-            <a:endParaRPr lang="en-US" dirty="0"/>
+              <a:t>Wed @ 1:00 pm – Noble 1231</a:t>
+            </a:r>
           </a:p>
           <a:p>
             <a:r>
@@ -3925,13 +3900,13 @@
           <p:nvPr/>
         </p:nvPicPr>
         <p:blipFill>
-          <a:blip r:embed="rId3">
+          <a:blip>
             <a:extLst>
               <a:ext uri="{28A0092B-C50C-407E-A947-70E740481C1C}">
                 <a14:useLocalDpi xmlns:a14="http://schemas.microsoft.com/office/drawing/2010/main" val="0"/>
               </a:ext>
               <a:ext uri="{96DAC541-7B7A-43D3-8B79-37D633B846F1}">
-                <asvg:svgBlip xmlns:asvg="http://schemas.microsoft.com/office/drawing/2016/SVG/main" r:embed="rId4"/>
+                <asvg:svgBlip xmlns:asvg="http://schemas.microsoft.com/office/drawing/2016/SVG/main" r:embed="rId3"/>
               </a:ext>
             </a:extLst>
           </a:blip>
@@ -4008,13 +3983,13 @@
           <p:nvPr/>
         </p:nvPicPr>
         <p:blipFill>
-          <a:blip r:embed="rId3">
+          <a:blip>
             <a:extLst>
               <a:ext uri="{28A0092B-C50C-407E-A947-70E740481C1C}">
                 <a14:useLocalDpi xmlns:a14="http://schemas.microsoft.com/office/drawing/2010/main" val="0"/>
               </a:ext>
               <a:ext uri="{96DAC541-7B7A-43D3-8B79-37D633B846F1}">
-                <asvg:svgBlip xmlns:asvg="http://schemas.microsoft.com/office/drawing/2016/SVG/main" r:embed="rId4"/>
+                <asvg:svgBlip xmlns:asvg="http://schemas.microsoft.com/office/drawing/2016/SVG/main" r:embed="rId3"/>
               </a:ext>
             </a:extLst>
           </a:blip>
@@ -4520,13 +4495,13 @@
           <p:nvPr/>
         </p:nvPicPr>
         <p:blipFill>
-          <a:blip r:embed="rId3">
+          <a:blip>
             <a:extLst>
               <a:ext uri="{28A0092B-C50C-407E-A947-70E740481C1C}">
                 <a14:useLocalDpi xmlns:a14="http://schemas.microsoft.com/office/drawing/2010/main" val="0"/>
               </a:ext>
               <a:ext uri="{96DAC541-7B7A-43D3-8B79-37D633B846F1}">
-                <asvg:svgBlip xmlns:asvg="http://schemas.microsoft.com/office/drawing/2016/SVG/main" r:embed="rId4"/>
+                <asvg:svgBlip xmlns:asvg="http://schemas.microsoft.com/office/drawing/2016/SVG/main" r:embed="rId3"/>
               </a:ext>
             </a:extLst>
           </a:blip>
@@ -4603,13 +4578,13 @@
           <p:nvPr/>
         </p:nvPicPr>
         <p:blipFill>
-          <a:blip r:embed="rId3">
+          <a:blip>
             <a:extLst>
               <a:ext uri="{28A0092B-C50C-407E-A947-70E740481C1C}">
                 <a14:useLocalDpi xmlns:a14="http://schemas.microsoft.com/office/drawing/2010/main" val="0"/>
               </a:ext>
               <a:ext uri="{96DAC541-7B7A-43D3-8B79-37D633B846F1}">
-                <asvg:svgBlip xmlns:asvg="http://schemas.microsoft.com/office/drawing/2016/SVG/main" r:embed="rId4"/>
+                <asvg:svgBlip xmlns:asvg="http://schemas.microsoft.com/office/drawing/2016/SVG/main" r:embed="rId3"/>
               </a:ext>
             </a:extLst>
           </a:blip>
@@ -4936,7 +4911,7 @@
           <p:nvPr/>
         </p:nvPicPr>
         <p:blipFill>
-          <a:blip r:embed="rId5">
+          <a:blip r:embed="rId4">
             <a:extLst>
               <a:ext uri="{28A0092B-C50C-407E-A947-70E740481C1C}">
                 <a14:useLocalDpi xmlns:a14="http://schemas.microsoft.com/office/drawing/2010/main" val="0"/>
@@ -5153,13 +5128,13 @@
           <p:nvPr/>
         </p:nvPicPr>
         <p:blipFill>
-          <a:blip r:embed="rId3">
+          <a:blip>
             <a:extLst>
               <a:ext uri="{28A0092B-C50C-407E-A947-70E740481C1C}">
                 <a14:useLocalDpi xmlns:a14="http://schemas.microsoft.com/office/drawing/2010/main" val="0"/>
               </a:ext>
               <a:ext uri="{96DAC541-7B7A-43D3-8B79-37D633B846F1}">
-                <asvg:svgBlip xmlns:asvg="http://schemas.microsoft.com/office/drawing/2016/SVG/main" r:embed="rId4"/>
+                <asvg:svgBlip xmlns:asvg="http://schemas.microsoft.com/office/drawing/2016/SVG/main" r:embed="rId3"/>
               </a:ext>
             </a:extLst>
           </a:blip>
@@ -5620,13 +5595,13 @@
           <p:nvPr/>
         </p:nvPicPr>
         <p:blipFill>
-          <a:blip r:embed="rId3">
+          <a:blip>
             <a:extLst>
               <a:ext uri="{28A0092B-C50C-407E-A947-70E740481C1C}">
                 <a14:useLocalDpi xmlns:a14="http://schemas.microsoft.com/office/drawing/2010/main" val="0"/>
               </a:ext>
               <a:ext uri="{96DAC541-7B7A-43D3-8B79-37D633B846F1}">
-                <asvg:svgBlip xmlns:asvg="http://schemas.microsoft.com/office/drawing/2016/SVG/main" r:embed="rId4"/>
+                <asvg:svgBlip xmlns:asvg="http://schemas.microsoft.com/office/drawing/2016/SVG/main" r:embed="rId3"/>
               </a:ext>
             </a:extLst>
           </a:blip>
@@ -6218,18 +6193,23 @@
             <a:pPr lvl="1"/>
             <a:r>
               <a:rPr lang="en-US" dirty="0"/>
-              <a:t>Patrick Green – </a:t>
+              <a:t>Sebastian Escobar Alonso – </a:t>
             </a:r>
             <a:r>
               <a:rPr lang="en-US" dirty="0">
                 <a:hlinkClick r:id="rId3"/>
               </a:rPr>
-              <a:t>pagreen@ucsb.edu</a:t>
+              <a:t>sescobaralonso@ucsb.edu</a:t>
             </a:r>
             <a:r>
               <a:rPr lang="en-US" dirty="0"/>
-              <a:t>, @ (Patrick’s handle?)</a:t>
-            </a:r>
+              <a:t>, @</a:t>
+            </a:r>
+            <a:r>
+              <a:rPr lang="en-US" dirty="0" err="1"/>
+              <a:t>sescobaralonso</a:t>
+            </a:r>
+            <a:endParaRPr lang="en-US" dirty="0"/>
           </a:p>
         </p:txBody>
       </p:sp>
